--- a/Kanta/kalawat/Gugmang Way Sukod.pptx
+++ b/Kanta/kalawat/Gugmang Way Sukod.pptx
@@ -272,7 +272,7 @@
           <a:p>
             <a:fld id="{689CB065-93CC-4F93-97CB-5160E2F98F73}" type="datetimeFigureOut">
               <a:rPr lang="en-US" smtClean="0"/>
-              <a:t>2/15/2026</a:t>
+              <a:t>3/8/2026</a:t>
             </a:fld>
             <a:endParaRPr lang="en-US"/>
           </a:p>
@@ -470,7 +470,7 @@
           <a:p>
             <a:fld id="{689CB065-93CC-4F93-97CB-5160E2F98F73}" type="datetimeFigureOut">
               <a:rPr lang="en-US" smtClean="0"/>
-              <a:t>2/15/2026</a:t>
+              <a:t>3/8/2026</a:t>
             </a:fld>
             <a:endParaRPr lang="en-US"/>
           </a:p>
@@ -678,7 +678,7 @@
           <a:p>
             <a:fld id="{689CB065-93CC-4F93-97CB-5160E2F98F73}" type="datetimeFigureOut">
               <a:rPr lang="en-US" smtClean="0"/>
-              <a:t>2/15/2026</a:t>
+              <a:t>3/8/2026</a:t>
             </a:fld>
             <a:endParaRPr lang="en-US"/>
           </a:p>
@@ -876,7 +876,7 @@
           <a:p>
             <a:fld id="{689CB065-93CC-4F93-97CB-5160E2F98F73}" type="datetimeFigureOut">
               <a:rPr lang="en-US" smtClean="0"/>
-              <a:t>2/15/2026</a:t>
+              <a:t>3/8/2026</a:t>
             </a:fld>
             <a:endParaRPr lang="en-US"/>
           </a:p>
@@ -1151,7 +1151,7 @@
           <a:p>
             <a:fld id="{689CB065-93CC-4F93-97CB-5160E2F98F73}" type="datetimeFigureOut">
               <a:rPr lang="en-US" smtClean="0"/>
-              <a:t>2/15/2026</a:t>
+              <a:t>3/8/2026</a:t>
             </a:fld>
             <a:endParaRPr lang="en-US"/>
           </a:p>
@@ -1416,7 +1416,7 @@
           <a:p>
             <a:fld id="{689CB065-93CC-4F93-97CB-5160E2F98F73}" type="datetimeFigureOut">
               <a:rPr lang="en-US" smtClean="0"/>
-              <a:t>2/15/2026</a:t>
+              <a:t>3/8/2026</a:t>
             </a:fld>
             <a:endParaRPr lang="en-US"/>
           </a:p>
@@ -1828,7 +1828,7 @@
           <a:p>
             <a:fld id="{689CB065-93CC-4F93-97CB-5160E2F98F73}" type="datetimeFigureOut">
               <a:rPr lang="en-US" smtClean="0"/>
-              <a:t>2/15/2026</a:t>
+              <a:t>3/8/2026</a:t>
             </a:fld>
             <a:endParaRPr lang="en-US"/>
           </a:p>
@@ -1969,7 +1969,7 @@
           <a:p>
             <a:fld id="{689CB065-93CC-4F93-97CB-5160E2F98F73}" type="datetimeFigureOut">
               <a:rPr lang="en-US" smtClean="0"/>
-              <a:t>2/15/2026</a:t>
+              <a:t>3/8/2026</a:t>
             </a:fld>
             <a:endParaRPr lang="en-US"/>
           </a:p>
@@ -2082,7 +2082,7 @@
           <a:p>
             <a:fld id="{689CB065-93CC-4F93-97CB-5160E2F98F73}" type="datetimeFigureOut">
               <a:rPr lang="en-US" smtClean="0"/>
-              <a:t>2/15/2026</a:t>
+              <a:t>3/8/2026</a:t>
             </a:fld>
             <a:endParaRPr lang="en-US"/>
           </a:p>
@@ -2393,7 +2393,7 @@
           <a:p>
             <a:fld id="{689CB065-93CC-4F93-97CB-5160E2F98F73}" type="datetimeFigureOut">
               <a:rPr lang="en-US" smtClean="0"/>
-              <a:t>2/15/2026</a:t>
+              <a:t>3/8/2026</a:t>
             </a:fld>
             <a:endParaRPr lang="en-US"/>
           </a:p>
@@ -2681,7 +2681,7 @@
           <a:p>
             <a:fld id="{689CB065-93CC-4F93-97CB-5160E2F98F73}" type="datetimeFigureOut">
               <a:rPr lang="en-US" smtClean="0"/>
-              <a:t>2/15/2026</a:t>
+              <a:t>3/8/2026</a:t>
             </a:fld>
             <a:endParaRPr lang="en-US"/>
           </a:p>
@@ -2925,7 +2925,7 @@
           <a:p>
             <a:fld id="{689CB065-93CC-4F93-97CB-5160E2F98F73}" type="datetimeFigureOut">
               <a:rPr lang="en-US" smtClean="0"/>
-              <a:t>2/15/2026</a:t>
+              <a:t>3/8/2026</a:t>
             </a:fld>
             <a:endParaRPr lang="en-US"/>
           </a:p>
@@ -4710,7 +4710,7 @@
                 <a:latin typeface="Times New Roman" panose="02020603050405020304" pitchFamily="18" charset="0"/>
                 <a:cs typeface="Times New Roman" panose="02020603050405020304" pitchFamily="18" charset="0"/>
               </a:rPr>
-              <a:t>Katinaw</a:t>
+              <a:t>Kalinaw</a:t>
             </a:r>
             <a:r>
               <a:rPr lang="en-ID" sz="9000" dirty="0">
